--- a/assets/retired/public-use-poster.pptx
+++ b/assets/retired/public-use-poster.pptx
@@ -3843,7 +3843,7 @@
                 <a:ea typeface="Arial"/>
                 <a:cs typeface="Arial"/>
               </a:rPr>
-              <a:t>wvurail.org/dspira</a:t>
+              <a:t>rail.wvu.edu/dspira</a:t>
             </a:r>
           </a:p>
         </p:txBody>
